--- a/decks/englit-romeo/englit-romeo_ch1_world-of-verona.pptx
+++ b/decks/englit-romeo/englit-romeo_ch1_world-of-verona.pptx
@@ -125,36 +125,36 @@
   <p:extLst>
     <p:ext uri="{521415D9-36F7-43E2-AB2F-B90AF26B5E84}">
       <p14:sectionLst xmlns:p14="http://schemas.microsoft.com/office/powerpoint/2010/main">
-        <p14:section name="Opening" id="{c53b30cb-9cf8-73c4-f3b2-f58c86f072b6}">
+        <p14:section name="Opening" id="{f4a84759-eb0e-4eab-f05e-f097f469a23a}">
           <p14:sldIdLst>
             <p14:sldId id="256"/>
           </p14:sldIdLst>
         </p14:section>
-        <p14:section name="Gate" id="{0d16e7ae-43ca-e25d-df45-76256a319f8a}">
+        <p14:section name="Gate" id="{b5835b2a-56a3-c9ec-6902-2323e75d9078}">
           <p14:sldIdLst>
             <p14:sldId id="257"/>
             <p14:sldId id="258"/>
           </p14:sldIdLst>
         </p14:section>
-        <p14:section name="Pre-teach" id="{0044b536-ef43-5b14-bbaa-0e9924058bcc}">
+        <p14:section name="Pre-teach" id="{846fd074-a63f-7f06-3a1d-502a4da517b1}">
           <p14:sldIdLst>
             <p14:sldId id="259"/>
           </p14:sldIdLst>
         </p14:section>
-        <p14:section name="Read-along" id="{adfd4fa1-a2c4-5764-986c-9d513fc0acb0}">
+        <p14:section name="Read-along" id="{7f9e97d4-b111-3a23-451f-b402796d1b19}">
           <p14:sldIdLst>
             <p14:sldId id="260"/>
             <p14:sldId id="261"/>
           </p14:sldIdLst>
         </p14:section>
-        <p14:section name="Teach" id="{9747b46a-5bc0-25ee-579a-2cf1395359c4}">
+        <p14:section name="Teach" id="{e4f71ce4-a18e-9e29-0775-092ca672f635}">
           <p14:sldIdLst>
             <p14:sldId id="262"/>
             <p14:sldId id="263"/>
             <p14:sldId id="264"/>
           </p14:sldIdLst>
         </p14:section>
-        <p14:section name="Routes" id="{fd140fa8-ff56-17fc-3a6e-744586a5f68e}">
+        <p14:section name="Routes" id="{799aeb19-ff81-aa8a-23d1-e7e4d83fb55d}">
           <p14:sldIdLst>
             <p14:sldId id="265"/>
             <p14:sldId id="266"/>
@@ -164,12 +164,12 @@
             <p14:sldId id="270"/>
           </p14:sldIdLst>
         </p14:section>
-        <p14:section name="Close" id="{54680664-c54f-ddb0-4ac8-db4688ec3599}">
+        <p14:section name="Close" id="{153f442a-29e7-f517-f6a3-25cdabb0dc64}">
           <p14:sldIdLst>
             <p14:sldId id="271"/>
           </p14:sldIdLst>
         </p14:section>
-        <p14:section name="Answers" id="{25186afc-58da-e2d0-5939-3b99f5917377}">
+        <p14:section name="Answers" id="{cef7113e-320b-8fe5-1b8a-9b0a2e542979}">
           <p14:sldIdLst>
             <p14:sldId id="272"/>
             <p14:sldId id="273"/>
@@ -1237,7 +1237,7 @@
               <a:rPr lang="en-US" dirty="0"/>
               <a:t>Exit ticket — individual, silent, on a slip or mini-whiteboard. Recall before help: no notes, no lanes, no hints. Collect before pupils leave.
 Question: Who was on the English throne when Shakespeare wrote Romeo and Juliet in about 1595?
-Answer: D   Elizabeth I. Romeo and Juliet is an Elizabethan play. Elizabeth I reigned from 1558 to 1603.
+Answer: B   Elizabeth I. Romeo and Juliet is an Elizabethan play. Elizabeth I reigned from 1558 to 1603.
 Source of this question: gate item 1 re-asked (options rotated) — this chapter has no third quick-check module.
 The ebook also holds task 3, "The purpose of the Prologue", for homework or the next lesson's do now.
 Sort the slips: correct → ready to move on; incorrect → start next lesson in the pre-teach group, with the read-along and the Support lane. Same destination next time.</a:t>
@@ -1511,7 +1511,7 @@
             <a:r>
               <a:rPr lang="en-US" dirty="0"/>
               <a:t>Answers — exit ticket: Exit ticket. Reveal the answer; pupils mark their own work in a different colour, then read the "why" together. Same destination for every lane, so one answer serves the whole class.
-Answer: D   Elizabeth I
+Answer: B   Elizabeth I
 Why: Romeo and Juliet is an Elizabethan play. Elizabeth I reigned from 1558 to 1603.
 Ask a Support pupil to explain one step, and a Stretch pupil to share their extension.</a:t>
             </a:r>
@@ -1602,7 +1602,7 @@
             <a:r>
               <a:rPr lang="en-US" dirty="0"/>
               <a:t>Do now — retrieval. Silent, no notes, no help: recall comes before any support. Give about four minutes.
-1. Who was on the English throne when Shakespeare wrote Romeo and Juliet in about 1595?  →  A   Elizabeth I
+1. Who was on the English throne when Shakespeare wrote Romeo and Juliet in about 1595?  →  C   Elizabeth I
 2. The prologue is a sonnet. How many lines does a sonnet have?  →  14 lines
 3. In an Elizabethan family the father was the head of the household. We call a society run by men ___.  →  patriarchal
 Circulate: who gets 3/3 (Stretch route), 2/3 (Core), 0–1 (Support)? Use this to route pupils later in the lesson.</a:t>
@@ -1694,7 +1694,7 @@
             <a:r>
               <a:rPr lang="en-US" dirty="0"/>
               <a:t>Answers — pupils mark their own in a different colour, then hands up for 3/3, 2/3, 1/3.
-1. A   Elizabeth I. Romeo and Juliet is an Elizabethan play. Elizabeth I reigned from 1558 to 1603.
+1. C   Elizabeth I. Romeo and Juliet is an Elizabethan play. Elizabeth I reigned from 1558 to 1603.
 2. 14 lines. A sonnet has fourteen lines. Shakespeare's prologue is three groups of four lines and a closing rhyming couplet.
 3. patriarchal. Patriarchal comes from the Latin for father. Fathers held the power, and wives and children were expected to obey.
 Say the route each score points to: 3/3 Stretch, 2/3 Core, 0–1 Support. Pupils may choose to move up.</a:t>
@@ -9113,7 +9113,7 @@
                 <a:ea typeface="Calibri" pitchFamily="34" charset="-122"/>
                 <a:cs typeface="Calibri" pitchFamily="34" charset="-120"/>
               </a:rPr>
-              <a:t>Henry VIII</a:t>
+              <a:t>Elizabeth I</a:t>
             </a:r>
             <a:endParaRPr lang="en-US" sz="2400" dirty="0"/>
           </a:p>
@@ -9187,7 +9187,7 @@
                 <a:ea typeface="Calibri" pitchFamily="34" charset="-122"/>
                 <a:cs typeface="Calibri" pitchFamily="34" charset="-120"/>
               </a:rPr>
-              <a:t>Elizabeth I</a:t>
+              <a:t>Henry VIII</a:t>
             </a:r>
             <a:endParaRPr lang="en-US" sz="2400" dirty="0"/>
           </a:p>
@@ -10917,7 +10917,7 @@
                 <a:ea typeface="Cambria" pitchFamily="34" charset="-122"/>
                 <a:cs typeface="Cambria" pitchFamily="34" charset="-120"/>
               </a:rPr>
-              <a:t>D   Elizabeth I</a:t>
+              <a:t>B   Elizabeth I</a:t>
             </a:r>
             <a:endParaRPr lang="en-US" sz="1800" dirty="0"/>
           </a:p>
@@ -11451,7 +11451,7 @@
                 <a:ea typeface="Calibri" pitchFamily="34" charset="-122"/>
                 <a:cs typeface="Calibri" pitchFamily="34" charset="-120"/>
               </a:rPr>
-              <a:t>Elizabeth I</a:t>
+              <a:t>Henry VIII</a:t>
             </a:r>
             <a:endParaRPr lang="en-US" sz="2200" dirty="0"/>
           </a:p>
@@ -11525,7 +11525,7 @@
                 <a:ea typeface="Calibri" pitchFamily="34" charset="-122"/>
                 <a:cs typeface="Calibri" pitchFamily="34" charset="-120"/>
               </a:rPr>
-              <a:t>Henry VIII</a:t>
+              <a:t>Elizabeth I</a:t>
             </a:r>
             <a:endParaRPr lang="en-US" sz="2200" dirty="0"/>
           </a:p>
@@ -12359,7 +12359,7 @@
                 <a:ea typeface="Calibri" pitchFamily="34" charset="-122"/>
                 <a:cs typeface="Calibri" pitchFamily="34" charset="-120"/>
               </a:rPr>
-              <a:t>A   Elizabeth I</a:t>
+              <a:t>C   Elizabeth I</a:t>
             </a:r>
             <a:endParaRPr lang="en-US" sz="2200" dirty="0"/>
           </a:p>

--- a/decks/englit-romeo/englit-romeo_ch1_world-of-verona.pptx
+++ b/decks/englit-romeo/englit-romeo_ch1_world-of-verona.pptx
@@ -125,36 +125,36 @@
   <p:extLst>
     <p:ext uri="{521415D9-36F7-43E2-AB2F-B90AF26B5E84}">
       <p14:sectionLst xmlns:p14="http://schemas.microsoft.com/office/powerpoint/2010/main">
-        <p14:section name="Opening" id="{f4a84759-eb0e-4eab-f05e-f097f469a23a}">
+        <p14:section name="Opening" id="{358b9576-6399-1487-74f3-11570347e371}">
           <p14:sldIdLst>
             <p14:sldId id="256"/>
           </p14:sldIdLst>
         </p14:section>
-        <p14:section name="Gate" id="{b5835b2a-56a3-c9ec-6902-2323e75d9078}">
+        <p14:section name="Gate" id="{94ccf5d7-017c-4713-5b96-40fafd383120}">
           <p14:sldIdLst>
             <p14:sldId id="257"/>
             <p14:sldId id="258"/>
           </p14:sldIdLst>
         </p14:section>
-        <p14:section name="Pre-teach" id="{846fd074-a63f-7f06-3a1d-502a4da517b1}">
+        <p14:section name="Pre-teach" id="{57814bad-f638-c0ad-42b2-4d92cd8dd220}">
           <p14:sldIdLst>
             <p14:sldId id="259"/>
           </p14:sldIdLst>
         </p14:section>
-        <p14:section name="Read-along" id="{7f9e97d4-b111-3a23-451f-b402796d1b19}">
+        <p14:section name="Read-along" id="{37b8c68c-e21b-2d27-89ce-e234c5e19685}">
           <p14:sldIdLst>
             <p14:sldId id="260"/>
             <p14:sldId id="261"/>
           </p14:sldIdLst>
         </p14:section>
-        <p14:section name="Teach" id="{e4f71ce4-a18e-9e29-0775-092ca672f635}">
+        <p14:section name="Teach" id="{4b1520a6-81e0-d7a2-b9d9-62523fd9b776}">
           <p14:sldIdLst>
             <p14:sldId id="262"/>
             <p14:sldId id="263"/>
             <p14:sldId id="264"/>
           </p14:sldIdLst>
         </p14:section>
-        <p14:section name="Routes" id="{799aeb19-ff81-aa8a-23d1-e7e4d83fb55d}">
+        <p14:section name="Routes" id="{cddd3d77-fab9-9258-fe6f-5159b8d34924}">
           <p14:sldIdLst>
             <p14:sldId id="265"/>
             <p14:sldId id="266"/>
@@ -164,12 +164,12 @@
             <p14:sldId id="270"/>
           </p14:sldIdLst>
         </p14:section>
-        <p14:section name="Close" id="{153f442a-29e7-f517-f6a3-25cdabb0dc64}">
+        <p14:section name="Close" id="{d62b1b05-50f1-5ee5-5902-9a1093941acd}">
           <p14:sldIdLst>
             <p14:sldId id="271"/>
           </p14:sldIdLst>
         </p14:section>
-        <p14:section name="Answers" id="{cef7113e-320b-8fe5-1b8a-9b0a2e542979}">
+        <p14:section name="Answers" id="{beb7ecb0-2e61-29c3-2069-fc0d4c15540d}">
           <p14:sldIdLst>
             <p14:sldId id="272"/>
             <p14:sldId id="273"/>
